--- a/outputs/decks/slide-04.deck.pptx
+++ b/outputs/decks/slide-04.deck.pptx
@@ -521,6 +521,12 @@
           <a:p>
             <a:r>
               <a:t>Land-system and delivery layers create large uplift before the keys are handed over: land transformation, infrastructure, compliance, and risk-loaded margins.</a:t>
+            </a:r>
+          </a:p>
+          <a:p/>
+          <a:p>
+            <a:r>
+              <a:t>In this slide, rezoning/scarcity uplift means the planning-conversion premium: the value jump between raw land and approval-ready land, amplified when only limited serviced lots are released and when approval delays add carrying risk.</a:t>
             </a:r>
           </a:p>
           <a:p/>
@@ -3745,7 +3751,42 @@
       </p:sp>
       <p:sp>
         <p:nvSpPr>
-          <p:cNvPr id="7" name="Rectangle 6"/>
+          <p:cNvPr id="7" name="TextBox 6"/>
+          <p:cNvSpPr txBox="1"/>
+          <p:nvPr/>
+        </p:nvSpPr>
+        <p:spPr>
+          <a:xfrm>
+            <a:off x="548640" y="1481328"/>
+            <a:ext cx="7178040" cy="146304"/>
+          </a:xfrm>
+          <a:prstGeom prst="rect">
+            <a:avLst/>
+          </a:prstGeom>
+          <a:noFill/>
+        </p:spPr>
+        <p:txBody>
+          <a:bodyPr wrap="none">
+            <a:spAutoFit/>
+          </a:bodyPr>
+          <a:lstStyle/>
+          <a:p>
+            <a:pPr>
+              <a:defRPr sz="800" b="0">
+                <a:solidFill>
+                  <a:srgbClr val="464646"/>
+                </a:solidFill>
+              </a:defRPr>
+            </a:pPr>
+            <a:r>
+              <a:t>Rezoning/scarcity uplift = value jump from non-urban land to approval-ready lots when serviced-lot supply is constrained.</a:t>
+            </a:r>
+          </a:p>
+        </p:txBody>
+      </p:sp>
+      <p:sp>
+        <p:nvSpPr>
+          <p:cNvPr id="8" name="Rectangle 7"/>
           <p:cNvSpPr/>
           <p:nvPr/>
         </p:nvSpPr>
@@ -3790,7 +3831,7 @@
       </p:sp>
       <p:sp>
         <p:nvSpPr>
-          <p:cNvPr id="8" name="Rectangle 7"/>
+          <p:cNvPr id="9" name="Rectangle 8"/>
           <p:cNvSpPr/>
           <p:nvPr/>
         </p:nvSpPr>
@@ -3835,7 +3876,7 @@
       </p:sp>
       <p:sp>
         <p:nvSpPr>
-          <p:cNvPr id="9" name="TextBox 8"/>
+          <p:cNvPr id="10" name="TextBox 9"/>
           <p:cNvSpPr txBox="1"/>
           <p:nvPr/>
         </p:nvSpPr>
@@ -3870,7 +3911,7 @@
       </p:sp>
       <p:sp>
         <p:nvSpPr>
-          <p:cNvPr id="10" name="TextBox 9"/>
+          <p:cNvPr id="11" name="TextBox 10"/>
           <p:cNvSpPr txBox="1"/>
           <p:nvPr/>
         </p:nvSpPr>
@@ -3909,7 +3950,7 @@
       </p:sp>
       <p:sp>
         <p:nvSpPr>
-          <p:cNvPr id="11" name="TextBox 10"/>
+          <p:cNvPr id="12" name="TextBox 11"/>
           <p:cNvSpPr txBox="1"/>
           <p:nvPr/>
         </p:nvSpPr>
@@ -3944,7 +3985,7 @@
       </p:sp>
       <p:sp>
         <p:nvSpPr>
-          <p:cNvPr id="12" name="Rectangle 11"/>
+          <p:cNvPr id="13" name="Rectangle 12"/>
           <p:cNvSpPr/>
           <p:nvPr/>
         </p:nvSpPr>
@@ -3989,7 +4030,7 @@
       </p:sp>
       <p:sp>
         <p:nvSpPr>
-          <p:cNvPr id="13" name="TextBox 12"/>
+          <p:cNvPr id="14" name="TextBox 13"/>
           <p:cNvSpPr txBox="1"/>
           <p:nvPr/>
         </p:nvSpPr>
@@ -4024,7 +4065,7 @@
       </p:sp>
       <p:sp>
         <p:nvSpPr>
-          <p:cNvPr id="14" name="TextBox 13"/>
+          <p:cNvPr id="15" name="TextBox 14"/>
           <p:cNvSpPr txBox="1"/>
           <p:nvPr/>
         </p:nvSpPr>
@@ -4063,7 +4104,7 @@
       </p:sp>
       <p:sp>
         <p:nvSpPr>
-          <p:cNvPr id="15" name="TextBox 14"/>
+          <p:cNvPr id="16" name="TextBox 15"/>
           <p:cNvSpPr txBox="1"/>
           <p:nvPr/>
         </p:nvSpPr>
@@ -4098,7 +4139,7 @@
       </p:sp>
       <p:sp>
         <p:nvSpPr>
-          <p:cNvPr id="16" name="Rectangle 15"/>
+          <p:cNvPr id="17" name="Rectangle 16"/>
           <p:cNvSpPr/>
           <p:nvPr/>
         </p:nvSpPr>
@@ -4143,7 +4184,7 @@
       </p:sp>
       <p:sp>
         <p:nvSpPr>
-          <p:cNvPr id="17" name="TextBox 16"/>
+          <p:cNvPr id="18" name="TextBox 17"/>
           <p:cNvSpPr txBox="1"/>
           <p:nvPr/>
         </p:nvSpPr>
@@ -4178,7 +4219,7 @@
       </p:sp>
       <p:sp>
         <p:nvSpPr>
-          <p:cNvPr id="18" name="TextBox 17"/>
+          <p:cNvPr id="19" name="TextBox 18"/>
           <p:cNvSpPr txBox="1"/>
           <p:nvPr/>
         </p:nvSpPr>
@@ -4217,7 +4258,7 @@
       </p:sp>
       <p:sp>
         <p:nvSpPr>
-          <p:cNvPr id="19" name="TextBox 18"/>
+          <p:cNvPr id="20" name="TextBox 19"/>
           <p:cNvSpPr txBox="1"/>
           <p:nvPr/>
         </p:nvSpPr>
@@ -4252,7 +4293,7 @@
       </p:sp>
       <p:sp>
         <p:nvSpPr>
-          <p:cNvPr id="20" name="Rectangle 19"/>
+          <p:cNvPr id="21" name="Rectangle 20"/>
           <p:cNvSpPr/>
           <p:nvPr/>
         </p:nvSpPr>
@@ -4297,7 +4338,7 @@
       </p:sp>
       <p:sp>
         <p:nvSpPr>
-          <p:cNvPr id="21" name="TextBox 20"/>
+          <p:cNvPr id="22" name="TextBox 21"/>
           <p:cNvSpPr txBox="1"/>
           <p:nvPr/>
         </p:nvSpPr>
@@ -4332,7 +4373,7 @@
       </p:sp>
       <p:sp>
         <p:nvSpPr>
-          <p:cNvPr id="22" name="TextBox 21"/>
+          <p:cNvPr id="23" name="TextBox 22"/>
           <p:cNvSpPr txBox="1"/>
           <p:nvPr/>
         </p:nvSpPr>
@@ -4367,7 +4408,7 @@
       </p:sp>
       <p:sp>
         <p:nvSpPr>
-          <p:cNvPr id="23" name="TextBox 22"/>
+          <p:cNvPr id="24" name="TextBox 23"/>
           <p:cNvSpPr txBox="1"/>
           <p:nvPr/>
         </p:nvSpPr>
@@ -4402,7 +4443,7 @@
       </p:sp>
       <p:sp>
         <p:nvSpPr>
-          <p:cNvPr id="24" name="Rectangle 23"/>
+          <p:cNvPr id="25" name="Rectangle 24"/>
           <p:cNvSpPr/>
           <p:nvPr/>
         </p:nvSpPr>
@@ -4447,7 +4488,7 @@
       </p:sp>
       <p:sp>
         <p:nvSpPr>
-          <p:cNvPr id="25" name="TextBox 24"/>
+          <p:cNvPr id="26" name="TextBox 25"/>
           <p:cNvSpPr txBox="1"/>
           <p:nvPr/>
         </p:nvSpPr>
@@ -4482,7 +4523,7 @@
       </p:sp>
       <p:sp>
         <p:nvSpPr>
-          <p:cNvPr id="26" name="TextBox 25"/>
+          <p:cNvPr id="27" name="TextBox 26"/>
           <p:cNvSpPr txBox="1"/>
           <p:nvPr/>
         </p:nvSpPr>
@@ -4521,7 +4562,7 @@
       </p:sp>
       <p:sp>
         <p:nvSpPr>
-          <p:cNvPr id="27" name="TextBox 26"/>
+          <p:cNvPr id="28" name="TextBox 27"/>
           <p:cNvSpPr txBox="1"/>
           <p:nvPr/>
         </p:nvSpPr>
@@ -4556,7 +4597,7 @@
       </p:sp>
       <p:sp>
         <p:nvSpPr>
-          <p:cNvPr id="28" name="Rectangle 27"/>
+          <p:cNvPr id="29" name="Rectangle 28"/>
           <p:cNvSpPr/>
           <p:nvPr/>
         </p:nvSpPr>
@@ -4601,7 +4642,7 @@
       </p:sp>
       <p:sp>
         <p:nvSpPr>
-          <p:cNvPr id="29" name="TextBox 28"/>
+          <p:cNvPr id="30" name="TextBox 29"/>
           <p:cNvSpPr txBox="1"/>
           <p:nvPr/>
         </p:nvSpPr>
@@ -4636,7 +4677,7 @@
       </p:sp>
       <p:sp>
         <p:nvSpPr>
-          <p:cNvPr id="30" name="TextBox 29"/>
+          <p:cNvPr id="31" name="TextBox 30"/>
           <p:cNvSpPr txBox="1"/>
           <p:nvPr/>
         </p:nvSpPr>
@@ -4675,7 +4716,7 @@
       </p:sp>
       <p:sp>
         <p:nvSpPr>
-          <p:cNvPr id="31" name="TextBox 30"/>
+          <p:cNvPr id="32" name="TextBox 31"/>
           <p:cNvSpPr txBox="1"/>
           <p:nvPr/>
         </p:nvSpPr>
@@ -4710,7 +4751,7 @@
       </p:sp>
       <p:sp>
         <p:nvSpPr>
-          <p:cNvPr id="32" name="Rectangle 31"/>
+          <p:cNvPr id="33" name="Rectangle 32"/>
           <p:cNvSpPr/>
           <p:nvPr/>
         </p:nvSpPr>
@@ -4755,7 +4796,7 @@
       </p:sp>
       <p:sp>
         <p:nvSpPr>
-          <p:cNvPr id="33" name="TextBox 32"/>
+          <p:cNvPr id="34" name="TextBox 33"/>
           <p:cNvSpPr txBox="1"/>
           <p:nvPr/>
         </p:nvSpPr>
@@ -4790,7 +4831,7 @@
       </p:sp>
       <p:sp>
         <p:nvSpPr>
-          <p:cNvPr id="34" name="TextBox 33"/>
+          <p:cNvPr id="35" name="TextBox 34"/>
           <p:cNvSpPr txBox="1"/>
           <p:nvPr/>
         </p:nvSpPr>
@@ -4829,7 +4870,7 @@
       </p:sp>
       <p:sp>
         <p:nvSpPr>
-          <p:cNvPr id="35" name="TextBox 34"/>
+          <p:cNvPr id="36" name="TextBox 35"/>
           <p:cNvSpPr txBox="1"/>
           <p:nvPr/>
         </p:nvSpPr>
@@ -4864,7 +4905,7 @@
       </p:sp>
       <p:sp>
         <p:nvSpPr>
-          <p:cNvPr id="36" name="TextBox 35"/>
+          <p:cNvPr id="37" name="TextBox 36"/>
           <p:cNvSpPr txBox="1"/>
           <p:nvPr/>
         </p:nvSpPr>
@@ -4899,7 +4940,7 @@
       </p:sp>
       <p:sp>
         <p:nvSpPr>
-          <p:cNvPr id="37" name="Rectangle 36"/>
+          <p:cNvPr id="38" name="Rectangle 37"/>
           <p:cNvSpPr/>
           <p:nvPr/>
         </p:nvSpPr>
@@ -4944,7 +4985,7 @@
       </p:sp>
       <p:sp>
         <p:nvSpPr>
-          <p:cNvPr id="38" name="TextBox 37"/>
+          <p:cNvPr id="39" name="TextBox 38"/>
           <p:cNvSpPr txBox="1"/>
           <p:nvPr/>
         </p:nvSpPr>
@@ -4979,7 +5020,7 @@
       </p:sp>
       <p:sp>
         <p:nvSpPr>
-          <p:cNvPr id="39" name="TextBox 38"/>
+          <p:cNvPr id="40" name="TextBox 39"/>
           <p:cNvSpPr txBox="1"/>
           <p:nvPr/>
         </p:nvSpPr>
@@ -5014,7 +5055,7 @@
       </p:sp>
       <p:sp>
         <p:nvSpPr>
-          <p:cNvPr id="40" name="TextBox 39"/>
+          <p:cNvPr id="41" name="TextBox 40"/>
           <p:cNvSpPr txBox="1"/>
           <p:nvPr/>
         </p:nvSpPr>
@@ -5049,7 +5090,7 @@
       </p:sp>
       <p:sp>
         <p:nvSpPr>
-          <p:cNvPr id="41" name="TextBox 40"/>
+          <p:cNvPr id="42" name="TextBox 41"/>
           <p:cNvSpPr txBox="1"/>
           <p:nvPr/>
         </p:nvSpPr>
@@ -5084,7 +5125,7 @@
       </p:sp>
       <p:sp>
         <p:nvSpPr>
-          <p:cNvPr id="42" name="TextBox 41"/>
+          <p:cNvPr id="43" name="TextBox 42"/>
           <p:cNvSpPr txBox="1"/>
           <p:nvPr/>
         </p:nvSpPr>
@@ -5119,7 +5160,7 @@
       </p:sp>
       <p:sp>
         <p:nvSpPr>
-          <p:cNvPr id="43" name="TextBox 42"/>
+          <p:cNvPr id="44" name="TextBox 43"/>
           <p:cNvSpPr txBox="1"/>
           <p:nvPr/>
         </p:nvSpPr>
@@ -5154,7 +5195,7 @@
       </p:sp>
       <p:sp>
         <p:nvSpPr>
-          <p:cNvPr id="44" name="TextBox 43"/>
+          <p:cNvPr id="45" name="TextBox 44"/>
           <p:cNvSpPr txBox="1"/>
           <p:nvPr/>
         </p:nvSpPr>
@@ -5189,7 +5230,7 @@
       </p:sp>
       <p:sp>
         <p:nvSpPr>
-          <p:cNvPr id="45" name="TextBox 44"/>
+          <p:cNvPr id="46" name="TextBox 45"/>
           <p:cNvSpPr txBox="1"/>
           <p:nvPr/>
         </p:nvSpPr>
@@ -5224,7 +5265,7 @@
       </p:sp>
       <p:sp>
         <p:nvSpPr>
-          <p:cNvPr id="46" name="TextBox 45"/>
+          <p:cNvPr id="47" name="TextBox 46"/>
           <p:cNvSpPr txBox="1"/>
           <p:nvPr/>
         </p:nvSpPr>
@@ -5259,7 +5300,7 @@
       </p:sp>
       <p:sp>
         <p:nvSpPr>
-          <p:cNvPr id="47" name="TextBox 46"/>
+          <p:cNvPr id="48" name="TextBox 47"/>
           <p:cNvSpPr txBox="1"/>
           <p:nvPr/>
         </p:nvSpPr>
@@ -5294,7 +5335,7 @@
       </p:sp>
       <p:sp>
         <p:nvSpPr>
-          <p:cNvPr id="48" name="TextBox 47"/>
+          <p:cNvPr id="49" name="TextBox 48"/>
           <p:cNvSpPr txBox="1"/>
           <p:nvPr/>
         </p:nvSpPr>
@@ -5329,7 +5370,7 @@
       </p:sp>
       <p:sp>
         <p:nvSpPr>
-          <p:cNvPr id="49" name="TextBox 48"/>
+          <p:cNvPr id="50" name="TextBox 49"/>
           <p:cNvSpPr txBox="1"/>
           <p:nvPr/>
         </p:nvSpPr>
@@ -5364,7 +5405,7 @@
       </p:sp>
       <p:sp>
         <p:nvSpPr>
-          <p:cNvPr id="50" name="TextBox 49"/>
+          <p:cNvPr id="51" name="TextBox 50"/>
           <p:cNvSpPr txBox="1"/>
           <p:nvPr/>
         </p:nvSpPr>
@@ -5399,7 +5440,7 @@
       </p:sp>
       <p:sp>
         <p:nvSpPr>
-          <p:cNvPr id="51" name="TextBox 50"/>
+          <p:cNvPr id="52" name="TextBox 51"/>
           <p:cNvSpPr txBox="1"/>
           <p:nvPr/>
         </p:nvSpPr>
@@ -5434,7 +5475,7 @@
       </p:sp>
       <p:sp>
         <p:nvSpPr>
-          <p:cNvPr id="52" name="TextBox 51"/>
+          <p:cNvPr id="53" name="TextBox 52"/>
           <p:cNvSpPr txBox="1"/>
           <p:nvPr/>
         </p:nvSpPr>
@@ -5469,7 +5510,7 @@
       </p:sp>
       <p:sp>
         <p:nvSpPr>
-          <p:cNvPr id="53" name="Rectangle 52"/>
+          <p:cNvPr id="54" name="Rectangle 53"/>
           <p:cNvSpPr/>
           <p:nvPr/>
         </p:nvSpPr>
@@ -5514,7 +5555,7 @@
       </p:sp>
       <p:sp>
         <p:nvSpPr>
-          <p:cNvPr id="54" name="TextBox 53"/>
+          <p:cNvPr id="55" name="TextBox 54"/>
           <p:cNvSpPr txBox="1"/>
           <p:nvPr/>
         </p:nvSpPr>
@@ -5549,7 +5590,7 @@
       </p:sp>
       <p:sp>
         <p:nvSpPr>
-          <p:cNvPr id="55" name="TextBox 54"/>
+          <p:cNvPr id="56" name="TextBox 55"/>
           <p:cNvSpPr txBox="1"/>
           <p:nvPr/>
         </p:nvSpPr>
@@ -5584,7 +5625,7 @@
       </p:sp>
       <p:sp>
         <p:nvSpPr>
-          <p:cNvPr id="56" name="TextBox 55"/>
+          <p:cNvPr id="57" name="TextBox 56"/>
           <p:cNvSpPr txBox="1"/>
           <p:nvPr/>
         </p:nvSpPr>
@@ -5612,14 +5653,14 @@
               </a:defRPr>
             </a:pPr>
             <a:r>
-              <a:t>Raw land is small; uplift happens later in the pipeline.</a:t>
-            </a:r>
-          </a:p>
-        </p:txBody>
-      </p:sp>
-      <p:sp>
-        <p:nvSpPr>
-          <p:cNvPr id="57" name="TextBox 56"/>
+              <a:t>Raw land is small; value lifts after planning conversion.</a:t>
+            </a:r>
+          </a:p>
+        </p:txBody>
+      </p:sp>
+      <p:sp>
+        <p:nvSpPr>
+          <p:cNvPr id="58" name="TextBox 57"/>
           <p:cNvSpPr txBox="1"/>
           <p:nvPr/>
         </p:nvSpPr>
@@ -5647,14 +5688,14 @@
               </a:defRPr>
             </a:pPr>
             <a:r>
-              <a:t>Land transformation, infra, and compliance create major uplift.</a:t>
-            </a:r>
-          </a:p>
-        </p:txBody>
-      </p:sp>
-      <p:sp>
-        <p:nvSpPr>
-          <p:cNvPr id="58" name="TextBox 57"/>
+              <a:t>Rezoning uplift reflects approvals limits + delay risk + scarcity.</a:t>
+            </a:r>
+          </a:p>
+        </p:txBody>
+      </p:sp>
+      <p:sp>
+        <p:nvSpPr>
+          <p:cNvPr id="59" name="TextBox 58"/>
           <p:cNvSpPr txBox="1"/>
           <p:nvPr/>
         </p:nvSpPr>
@@ -5689,7 +5730,7 @@
       </p:sp>
       <p:sp>
         <p:nvSpPr>
-          <p:cNvPr id="59" name="Rectangle 58"/>
+          <p:cNvPr id="60" name="Rectangle 59"/>
           <p:cNvSpPr/>
           <p:nvPr/>
         </p:nvSpPr>
@@ -5734,7 +5775,7 @@
       </p:sp>
       <p:sp>
         <p:nvSpPr>
-          <p:cNvPr id="60" name="TextBox 59"/>
+          <p:cNvPr id="61" name="TextBox 60"/>
           <p:cNvSpPr txBox="1"/>
           <p:nvPr/>
         </p:nvSpPr>
@@ -5769,7 +5810,7 @@
       </p:sp>
       <p:sp>
         <p:nvSpPr>
-          <p:cNvPr id="61" name="TextBox 60"/>
+          <p:cNvPr id="62" name="TextBox 61"/>
           <p:cNvSpPr txBox="1"/>
           <p:nvPr/>
         </p:nvSpPr>
